--- a/paper_draft/figures/ppt_for_figures.pptx
+++ b/paper_draft/figures/ppt_for_figures.pptx
@@ -6,6 +6,10 @@
   </p:sldMasterIdLst>
   <p:sldIdLst>
     <p:sldId id="288" r:id="rId2"/>
+    <p:sldId id="289" r:id="rId3"/>
+    <p:sldId id="290" r:id="rId4"/>
+    <p:sldId id="291" r:id="rId5"/>
+    <p:sldId id="264" r:id="rId6"/>
   </p:sldIdLst>
   <p:sldSz cx="12192000" cy="6858000"/>
   <p:notesSz cx="6858000" cy="9144000"/>
@@ -104,6 +108,11 @@
       </a:defRPr>
     </a:lvl9pPr>
   </p:defaultTextStyle>
+  <p:extLst>
+    <p:ext uri="{EFAFB233-063F-42B5-8137-9DF3F51BA10A}">
+      <p15:sldGuideLst xmlns:p15="http://schemas.microsoft.com/office/powerpoint/2012/main"/>
+    </p:ext>
+  </p:extLst>
 </p:presentation>
 </file>
 
@@ -254,7 +263,7 @@
           <a:p>
             <a:fld id="{2BFBAF12-DD5D-7144-BAF5-63CC8110871E}" type="datetimeFigureOut">
               <a:rPr lang="en-US" smtClean="0"/>
-              <a:t>8/7/23</a:t>
+              <a:t>6/3/24</a:t>
             </a:fld>
             <a:endParaRPr lang="en-US"/>
           </a:p>
@@ -452,7 +461,7 @@
           <a:p>
             <a:fld id="{2BFBAF12-DD5D-7144-BAF5-63CC8110871E}" type="datetimeFigureOut">
               <a:rPr lang="en-US" smtClean="0"/>
-              <a:t>8/7/23</a:t>
+              <a:t>6/3/24</a:t>
             </a:fld>
             <a:endParaRPr lang="en-US"/>
           </a:p>
@@ -660,7 +669,7 @@
           <a:p>
             <a:fld id="{2BFBAF12-DD5D-7144-BAF5-63CC8110871E}" type="datetimeFigureOut">
               <a:rPr lang="en-US" smtClean="0"/>
-              <a:t>8/7/23</a:t>
+              <a:t>6/3/24</a:t>
             </a:fld>
             <a:endParaRPr lang="en-US"/>
           </a:p>
@@ -858,7 +867,7 @@
           <a:p>
             <a:fld id="{2BFBAF12-DD5D-7144-BAF5-63CC8110871E}" type="datetimeFigureOut">
               <a:rPr lang="en-US" smtClean="0"/>
-              <a:t>8/7/23</a:t>
+              <a:t>6/3/24</a:t>
             </a:fld>
             <a:endParaRPr lang="en-US"/>
           </a:p>
@@ -1133,7 +1142,7 @@
           <a:p>
             <a:fld id="{2BFBAF12-DD5D-7144-BAF5-63CC8110871E}" type="datetimeFigureOut">
               <a:rPr lang="en-US" smtClean="0"/>
-              <a:t>8/7/23</a:t>
+              <a:t>6/3/24</a:t>
             </a:fld>
             <a:endParaRPr lang="en-US"/>
           </a:p>
@@ -1398,7 +1407,7 @@
           <a:p>
             <a:fld id="{2BFBAF12-DD5D-7144-BAF5-63CC8110871E}" type="datetimeFigureOut">
               <a:rPr lang="en-US" smtClean="0"/>
-              <a:t>8/7/23</a:t>
+              <a:t>6/3/24</a:t>
             </a:fld>
             <a:endParaRPr lang="en-US"/>
           </a:p>
@@ -1810,7 +1819,7 @@
           <a:p>
             <a:fld id="{2BFBAF12-DD5D-7144-BAF5-63CC8110871E}" type="datetimeFigureOut">
               <a:rPr lang="en-US" smtClean="0"/>
-              <a:t>8/7/23</a:t>
+              <a:t>6/3/24</a:t>
             </a:fld>
             <a:endParaRPr lang="en-US"/>
           </a:p>
@@ -1951,7 +1960,7 @@
           <a:p>
             <a:fld id="{2BFBAF12-DD5D-7144-BAF5-63CC8110871E}" type="datetimeFigureOut">
               <a:rPr lang="en-US" smtClean="0"/>
-              <a:t>8/7/23</a:t>
+              <a:t>6/3/24</a:t>
             </a:fld>
             <a:endParaRPr lang="en-US"/>
           </a:p>
@@ -2064,7 +2073,7 @@
           <a:p>
             <a:fld id="{2BFBAF12-DD5D-7144-BAF5-63CC8110871E}" type="datetimeFigureOut">
               <a:rPr lang="en-US" smtClean="0"/>
-              <a:t>8/7/23</a:t>
+              <a:t>6/3/24</a:t>
             </a:fld>
             <a:endParaRPr lang="en-US"/>
           </a:p>
@@ -2375,7 +2384,7 @@
           <a:p>
             <a:fld id="{2BFBAF12-DD5D-7144-BAF5-63CC8110871E}" type="datetimeFigureOut">
               <a:rPr lang="en-US" smtClean="0"/>
-              <a:t>8/7/23</a:t>
+              <a:t>6/3/24</a:t>
             </a:fld>
             <a:endParaRPr lang="en-US"/>
           </a:p>
@@ -2663,7 +2672,7 @@
           <a:p>
             <a:fld id="{2BFBAF12-DD5D-7144-BAF5-63CC8110871E}" type="datetimeFigureOut">
               <a:rPr lang="en-US" smtClean="0"/>
-              <a:t>8/7/23</a:t>
+              <a:t>6/3/24</a:t>
             </a:fld>
             <a:endParaRPr lang="en-US"/>
           </a:p>
@@ -2904,7 +2913,7 @@
           <a:p>
             <a:fld id="{2BFBAF12-DD5D-7144-BAF5-63CC8110871E}" type="datetimeFigureOut">
               <a:rPr lang="en-US" smtClean="0"/>
-              <a:t>8/7/23</a:t>
+              <a:t>6/3/24</a:t>
             </a:fld>
             <a:endParaRPr lang="en-US"/>
           </a:p>
@@ -3418,7 +3427,7 @@
                 <a:latin typeface="Arial" panose="020B0604020202020204" pitchFamily="34" charset="0"/>
                 <a:cs typeface="Arial" panose="020B0604020202020204" pitchFamily="34" charset="0"/>
               </a:rPr>
-              <a:t>Projection of spectra into PLSR components based on covariation with trait</a:t>
+              <a:t>Projection of spectra into orthogonal components</a:t>
             </a:r>
           </a:p>
         </p:txBody>
@@ -3877,7 +3886,7 @@
                 <a:latin typeface="Arial" panose="020B0604020202020204" pitchFamily="34" charset="0"/>
                 <a:cs typeface="Arial" panose="020B0604020202020204" pitchFamily="34" charset="0"/>
               </a:rPr>
-              <a:t>Use all spectra to fit the Bayesian model</a:t>
+              <a:t>Use all spectra on original scale to fit the model</a:t>
             </a:r>
           </a:p>
         </p:txBody>
@@ -3934,7 +3943,7 @@
                 <a:latin typeface="Arial" panose="020B0604020202020204" pitchFamily="34" charset="0"/>
                 <a:cs typeface="Arial" panose="020B0604020202020204" pitchFamily="34" charset="0"/>
               </a:rPr>
-              <a:t>Use projection predictive variable to select spectra</a:t>
+              <a:t>Use  predictive projection to find reduced model</a:t>
             </a:r>
           </a:p>
         </p:txBody>
@@ -4105,7 +4114,7 @@
                 <a:latin typeface="Arial" panose="020B0604020202020204" pitchFamily="34" charset="0"/>
                 <a:cs typeface="Arial" panose="020B0604020202020204" pitchFamily="34" charset="0"/>
               </a:rPr>
-              <a:t>Parameter probability distributions for Bayesian Linear Regression</a:t>
+              <a:t>Posterior parameter probability distributions</a:t>
             </a:r>
           </a:p>
         </p:txBody>
@@ -4918,7 +4927,7 @@
           </a:ln>
           <a:extLst>
             <a:ext uri="{C572A759-6A51-4108-AA02-DFA0A04FC94B}">
-              <ma14:wrappingTextBoxFlag xmlns:ma14="http://schemas.microsoft.com/office/mac/drawingml/2011/main" xmlns:a14="http://schemas.microsoft.com/office/drawing/2010/main" xmlns:m="http://schemas.openxmlformats.org/officeDocument/2006/math" xmlns="" val="1"/>
+              <ma14:wrappingTextBoxFlag xmlns="" xmlns:m="http://schemas.openxmlformats.org/officeDocument/2006/math" xmlns:a14="http://schemas.microsoft.com/office/drawing/2010/main" xmlns:ma14="http://schemas.microsoft.com/office/mac/drawingml/2011/main" val="1"/>
             </a:ext>
           </a:extLst>
         </p:spPr>
@@ -5028,6 +5037,240 @@
           </a:p>
         </p:txBody>
       </p:sp>
+      <p:cxnSp>
+        <p:nvCxnSpPr>
+          <p:cNvPr id="11" name="Straight Arrow Connector 10">
+            <a:extLst>
+              <a:ext uri="{FF2B5EF4-FFF2-40B4-BE49-F238E27FC236}">
+                <a16:creationId xmlns:a16="http://schemas.microsoft.com/office/drawing/2014/main" id="{5D71D382-CE5C-C29E-1DFF-F7BA6F19A83E}"/>
+              </a:ext>
+            </a:extLst>
+          </p:cNvPr>
+          <p:cNvCxnSpPr>
+            <a:cxnSpLocks/>
+          </p:cNvCxnSpPr>
+          <p:nvPr/>
+        </p:nvCxnSpPr>
+        <p:spPr>
+          <a:xfrm rot="11640000">
+            <a:off x="4582168" y="4346366"/>
+            <a:ext cx="228598" cy="914400"/>
+          </a:xfrm>
+          <a:prstGeom prst="straightConnector1">
+            <a:avLst/>
+          </a:prstGeom>
+          <a:ln w="19050">
+            <a:solidFill>
+              <a:schemeClr val="tx1"/>
+            </a:solidFill>
+            <a:prstDash val="sysDash"/>
+            <a:tailEnd type="triangle"/>
+          </a:ln>
+        </p:spPr>
+        <p:style>
+          <a:lnRef idx="1">
+            <a:schemeClr val="accent1"/>
+          </a:lnRef>
+          <a:fillRef idx="0">
+            <a:schemeClr val="accent1"/>
+          </a:fillRef>
+          <a:effectRef idx="0">
+            <a:schemeClr val="accent1"/>
+          </a:effectRef>
+          <a:fontRef idx="minor">
+            <a:schemeClr val="tx1"/>
+          </a:fontRef>
+        </p:style>
+      </p:cxnSp>
+      <p:cxnSp>
+        <p:nvCxnSpPr>
+          <p:cNvPr id="14" name="Straight Arrow Connector 13">
+            <a:extLst>
+              <a:ext uri="{FF2B5EF4-FFF2-40B4-BE49-F238E27FC236}">
+                <a16:creationId xmlns:a16="http://schemas.microsoft.com/office/drawing/2014/main" id="{027D9D41-0FFA-8CEA-9C5C-22DF76BA3C98}"/>
+              </a:ext>
+            </a:extLst>
+          </p:cNvPr>
+          <p:cNvCxnSpPr>
+            <a:cxnSpLocks/>
+          </p:cNvCxnSpPr>
+          <p:nvPr/>
+        </p:nvCxnSpPr>
+        <p:spPr>
+          <a:xfrm flipV="1">
+            <a:off x="4689490" y="4327464"/>
+            <a:ext cx="2318489" cy="7762"/>
+          </a:xfrm>
+          <a:prstGeom prst="straightConnector1">
+            <a:avLst/>
+          </a:prstGeom>
+          <a:ln w="19050">
+            <a:solidFill>
+              <a:schemeClr val="tx1"/>
+            </a:solidFill>
+            <a:prstDash val="sysDash"/>
+            <a:tailEnd type="triangle"/>
+          </a:ln>
+        </p:spPr>
+        <p:style>
+          <a:lnRef idx="1">
+            <a:schemeClr val="accent1"/>
+          </a:lnRef>
+          <a:fillRef idx="0">
+            <a:schemeClr val="accent1"/>
+          </a:fillRef>
+          <a:effectRef idx="0">
+            <a:schemeClr val="accent1"/>
+          </a:effectRef>
+          <a:fontRef idx="minor">
+            <a:schemeClr val="tx1"/>
+          </a:fontRef>
+        </p:style>
+      </p:cxnSp>
+      <p:cxnSp>
+        <p:nvCxnSpPr>
+          <p:cNvPr id="16" name="Straight Arrow Connector 15">
+            <a:extLst>
+              <a:ext uri="{FF2B5EF4-FFF2-40B4-BE49-F238E27FC236}">
+                <a16:creationId xmlns:a16="http://schemas.microsoft.com/office/drawing/2014/main" id="{12E93346-BB6F-1456-B1A6-FEE81209858A}"/>
+              </a:ext>
+            </a:extLst>
+          </p:cNvPr>
+          <p:cNvCxnSpPr>
+            <a:cxnSpLocks/>
+          </p:cNvCxnSpPr>
+          <p:nvPr/>
+        </p:nvCxnSpPr>
+        <p:spPr>
+          <a:xfrm rot="840000">
+            <a:off x="6893681" y="4346366"/>
+            <a:ext cx="228598" cy="914400"/>
+          </a:xfrm>
+          <a:prstGeom prst="straightConnector1">
+            <a:avLst/>
+          </a:prstGeom>
+          <a:ln w="19050">
+            <a:solidFill>
+              <a:schemeClr val="tx1"/>
+            </a:solidFill>
+            <a:prstDash val="sysDash"/>
+            <a:tailEnd type="triangle"/>
+          </a:ln>
+        </p:spPr>
+        <p:style>
+          <a:lnRef idx="1">
+            <a:schemeClr val="accent1"/>
+          </a:lnRef>
+          <a:fillRef idx="0">
+            <a:schemeClr val="accent1"/>
+          </a:fillRef>
+          <a:effectRef idx="0">
+            <a:schemeClr val="accent1"/>
+          </a:effectRef>
+          <a:fontRef idx="minor">
+            <a:schemeClr val="tx1"/>
+          </a:fontRef>
+        </p:style>
+      </p:cxnSp>
+      <p:sp>
+        <p:nvSpPr>
+          <p:cNvPr id="17" name="Rounded Rectangle 16">
+            <a:extLst>
+              <a:ext uri="{FF2B5EF4-FFF2-40B4-BE49-F238E27FC236}">
+                <a16:creationId xmlns:a16="http://schemas.microsoft.com/office/drawing/2014/main" id="{3547D51A-CA05-5A2C-044C-19B36EF6F543}"/>
+              </a:ext>
+            </a:extLst>
+          </p:cNvPr>
+          <p:cNvSpPr/>
+          <p:nvPr/>
+        </p:nvSpPr>
+        <p:spPr>
+          <a:xfrm>
+            <a:off x="856197" y="4922716"/>
+            <a:ext cx="1454584" cy="780821"/>
+          </a:xfrm>
+          <a:prstGeom prst="roundRect">
+            <a:avLst/>
+          </a:prstGeom>
+          <a:solidFill>
+            <a:schemeClr val="accent2">
+              <a:lumMod val="60000"/>
+              <a:lumOff val="40000"/>
+            </a:schemeClr>
+          </a:solidFill>
+        </p:spPr>
+        <p:style>
+          <a:lnRef idx="2">
+            <a:schemeClr val="accent1">
+              <a:shade val="50000"/>
+            </a:schemeClr>
+          </a:lnRef>
+          <a:fillRef idx="1">
+            <a:schemeClr val="accent1"/>
+          </a:fillRef>
+          <a:effectRef idx="0">
+            <a:schemeClr val="accent1"/>
+          </a:effectRef>
+          <a:fontRef idx="minor">
+            <a:schemeClr val="lt1"/>
+          </a:fontRef>
+        </p:style>
+        <p:txBody>
+          <a:bodyPr rtlCol="0" anchor="ctr"/>
+          <a:lstStyle/>
+          <a:p>
+            <a:r>
+              <a:rPr lang="en-US" sz="1200" dirty="0">
+                <a:latin typeface="Arial" panose="020B0604020202020204" pitchFamily="34" charset="0"/>
+                <a:cs typeface="Arial" panose="020B0604020202020204" pitchFamily="34" charset="0"/>
+              </a:rPr>
+              <a:t>Informative priors </a:t>
+            </a:r>
+          </a:p>
+        </p:txBody>
+      </p:sp>
+      <p:cxnSp>
+        <p:nvCxnSpPr>
+          <p:cNvPr id="18" name="Straight Arrow Connector 17">
+            <a:extLst>
+              <a:ext uri="{FF2B5EF4-FFF2-40B4-BE49-F238E27FC236}">
+                <a16:creationId xmlns:a16="http://schemas.microsoft.com/office/drawing/2014/main" id="{6BE41D85-451F-1011-1922-730CBFDECB63}"/>
+              </a:ext>
+            </a:extLst>
+          </p:cNvPr>
+          <p:cNvCxnSpPr/>
+          <p:nvPr/>
+        </p:nvCxnSpPr>
+        <p:spPr>
+          <a:xfrm>
+            <a:off x="2315019" y="5304883"/>
+            <a:ext cx="228598" cy="4232"/>
+          </a:xfrm>
+          <a:prstGeom prst="straightConnector1">
+            <a:avLst/>
+          </a:prstGeom>
+          <a:ln w="19050">
+            <a:solidFill>
+              <a:schemeClr val="tx1"/>
+            </a:solidFill>
+            <a:tailEnd type="triangle"/>
+          </a:ln>
+        </p:spPr>
+        <p:style>
+          <a:lnRef idx="1">
+            <a:schemeClr val="accent1"/>
+          </a:lnRef>
+          <a:fillRef idx="0">
+            <a:schemeClr val="accent1"/>
+          </a:fillRef>
+          <a:effectRef idx="0">
+            <a:schemeClr val="accent1"/>
+          </a:effectRef>
+          <a:fontRef idx="minor">
+            <a:schemeClr val="tx1"/>
+          </a:fontRef>
+        </p:style>
+      </p:cxnSp>
     </p:spTree>
     <p:extLst>
       <p:ext uri="{BB962C8B-B14F-4D97-AF65-F5344CB8AC3E}">
@@ -6180,6 +6423,213 @@
                       </p:childTnLst>
                     </p:cTn>
                   </p:par>
+                  <p:par>
+                    <p:cTn id="95" fill="hold">
+                      <p:stCondLst>
+                        <p:cond delay="indefinite"/>
+                      </p:stCondLst>
+                      <p:childTnLst>
+                        <p:par>
+                          <p:cTn id="96" fill="hold">
+                            <p:stCondLst>
+                              <p:cond delay="0"/>
+                            </p:stCondLst>
+                            <p:childTnLst>
+                              <p:par>
+                                <p:cTn id="97" presetID="1" presetClass="entr" presetSubtype="0" fill="hold" nodeType="clickEffect">
+                                  <p:stCondLst>
+                                    <p:cond delay="0"/>
+                                  </p:stCondLst>
+                                  <p:childTnLst>
+                                    <p:set>
+                                      <p:cBhvr>
+                                        <p:cTn id="98" dur="1" fill="hold">
+                                          <p:stCondLst>
+                                            <p:cond delay="0"/>
+                                          </p:stCondLst>
+                                        </p:cTn>
+                                        <p:tgtEl>
+                                          <p:spTgt spid="11"/>
+                                        </p:tgtEl>
+                                        <p:attrNameLst>
+                                          <p:attrName>style.visibility</p:attrName>
+                                        </p:attrNameLst>
+                                      </p:cBhvr>
+                                      <p:to>
+                                        <p:strVal val="visible"/>
+                                      </p:to>
+                                    </p:set>
+                                  </p:childTnLst>
+                                </p:cTn>
+                              </p:par>
+                            </p:childTnLst>
+                          </p:cTn>
+                        </p:par>
+                      </p:childTnLst>
+                    </p:cTn>
+                  </p:par>
+                  <p:par>
+                    <p:cTn id="99" fill="hold">
+                      <p:stCondLst>
+                        <p:cond delay="indefinite"/>
+                      </p:stCondLst>
+                      <p:childTnLst>
+                        <p:par>
+                          <p:cTn id="100" fill="hold">
+                            <p:stCondLst>
+                              <p:cond delay="0"/>
+                            </p:stCondLst>
+                            <p:childTnLst>
+                              <p:par>
+                                <p:cTn id="101" presetID="1" presetClass="entr" presetSubtype="0" fill="hold" nodeType="clickEffect">
+                                  <p:stCondLst>
+                                    <p:cond delay="0"/>
+                                  </p:stCondLst>
+                                  <p:childTnLst>
+                                    <p:set>
+                                      <p:cBhvr>
+                                        <p:cTn id="102" dur="1" fill="hold">
+                                          <p:stCondLst>
+                                            <p:cond delay="0"/>
+                                          </p:stCondLst>
+                                        </p:cTn>
+                                        <p:tgtEl>
+                                          <p:spTgt spid="14"/>
+                                        </p:tgtEl>
+                                        <p:attrNameLst>
+                                          <p:attrName>style.visibility</p:attrName>
+                                        </p:attrNameLst>
+                                      </p:cBhvr>
+                                      <p:to>
+                                        <p:strVal val="visible"/>
+                                      </p:to>
+                                    </p:set>
+                                  </p:childTnLst>
+                                </p:cTn>
+                              </p:par>
+                            </p:childTnLst>
+                          </p:cTn>
+                        </p:par>
+                      </p:childTnLst>
+                    </p:cTn>
+                  </p:par>
+                  <p:par>
+                    <p:cTn id="103" fill="hold">
+                      <p:stCondLst>
+                        <p:cond delay="indefinite"/>
+                      </p:stCondLst>
+                      <p:childTnLst>
+                        <p:par>
+                          <p:cTn id="104" fill="hold">
+                            <p:stCondLst>
+                              <p:cond delay="0"/>
+                            </p:stCondLst>
+                            <p:childTnLst>
+                              <p:par>
+                                <p:cTn id="105" presetID="1" presetClass="entr" presetSubtype="0" fill="hold" nodeType="clickEffect">
+                                  <p:stCondLst>
+                                    <p:cond delay="0"/>
+                                  </p:stCondLst>
+                                  <p:childTnLst>
+                                    <p:set>
+                                      <p:cBhvr>
+                                        <p:cTn id="106" dur="1" fill="hold">
+                                          <p:stCondLst>
+                                            <p:cond delay="0"/>
+                                          </p:stCondLst>
+                                        </p:cTn>
+                                        <p:tgtEl>
+                                          <p:spTgt spid="16"/>
+                                        </p:tgtEl>
+                                        <p:attrNameLst>
+                                          <p:attrName>style.visibility</p:attrName>
+                                        </p:attrNameLst>
+                                      </p:cBhvr>
+                                      <p:to>
+                                        <p:strVal val="visible"/>
+                                      </p:to>
+                                    </p:set>
+                                  </p:childTnLst>
+                                </p:cTn>
+                              </p:par>
+                              <p:par>
+                                <p:cTn id="107" presetID="1" presetClass="entr" presetSubtype="0" fill="hold" grpId="0" nodeType="withEffect">
+                                  <p:stCondLst>
+                                    <p:cond delay="0"/>
+                                  </p:stCondLst>
+                                  <p:childTnLst>
+                                    <p:set>
+                                      <p:cBhvr>
+                                        <p:cTn id="108" dur="1" fill="hold">
+                                          <p:stCondLst>
+                                            <p:cond delay="0"/>
+                                          </p:stCondLst>
+                                        </p:cTn>
+                                        <p:tgtEl>
+                                          <p:spTgt spid="17"/>
+                                        </p:tgtEl>
+                                        <p:attrNameLst>
+                                          <p:attrName>style.visibility</p:attrName>
+                                        </p:attrNameLst>
+                                      </p:cBhvr>
+                                      <p:to>
+                                        <p:strVal val="visible"/>
+                                      </p:to>
+                                    </p:set>
+                                  </p:childTnLst>
+                                </p:cTn>
+                              </p:par>
+                            </p:childTnLst>
+                          </p:cTn>
+                        </p:par>
+                      </p:childTnLst>
+                    </p:cTn>
+                  </p:par>
+                  <p:par>
+                    <p:cTn id="109" fill="hold">
+                      <p:stCondLst>
+                        <p:cond delay="indefinite"/>
+                      </p:stCondLst>
+                      <p:childTnLst>
+                        <p:par>
+                          <p:cTn id="110" fill="hold">
+                            <p:stCondLst>
+                              <p:cond delay="0"/>
+                            </p:stCondLst>
+                            <p:childTnLst>
+                              <p:par>
+                                <p:cTn id="111" presetID="1" presetClass="entr" presetSubtype="0" fill="hold" nodeType="clickEffect">
+                                  <p:stCondLst>
+                                    <p:cond delay="0"/>
+                                  </p:stCondLst>
+                                  <p:childTnLst>
+                                    <p:set>
+                                      <p:cBhvr>
+                                        <p:cTn id="112" dur="1" fill="hold">
+                                          <p:stCondLst>
+                                            <p:cond delay="0"/>
+                                          </p:stCondLst>
+                                        </p:cTn>
+                                        <p:tgtEl>
+                                          <p:spTgt spid="18"/>
+                                        </p:tgtEl>
+                                        <p:attrNameLst>
+                                          <p:attrName>style.visibility</p:attrName>
+                                        </p:attrNameLst>
+                                      </p:cBhvr>
+                                      <p:to>
+                                        <p:strVal val="visible"/>
+                                      </p:to>
+                                    </p:set>
+                                  </p:childTnLst>
+                                </p:cTn>
+                              </p:par>
+                            </p:childTnLst>
+                          </p:cTn>
+                        </p:par>
+                      </p:childTnLst>
+                    </p:cTn>
+                  </p:par>
                 </p:childTnLst>
               </p:cTn>
               <p:prevCondLst>
@@ -6221,8 +6671,741 @@
       <p:bldP spid="83" grpId="0" animBg="1"/>
       <p:bldP spid="84" grpId="0" animBg="1"/>
       <p:bldP spid="85" grpId="0" animBg="1"/>
+      <p:bldP spid="17" grpId="0" animBg="1"/>
     </p:bldLst>
   </p:timing>
+</p:sld>
+</file>
+
+<file path=ppt/slides/slide2.xml><?xml version="1.0" encoding="utf-8"?>
+<p:sld xmlns:a="http://schemas.openxmlformats.org/drawingml/2006/main" xmlns:r="http://schemas.openxmlformats.org/officeDocument/2006/relationships" xmlns:p="http://schemas.openxmlformats.org/presentationml/2006/main">
+  <p:cSld>
+    <p:spTree>
+      <p:nvGrpSpPr>
+        <p:cNvPr id="1" name=""/>
+        <p:cNvGrpSpPr/>
+        <p:nvPr/>
+      </p:nvGrpSpPr>
+      <p:grpSpPr>
+        <a:xfrm>
+          <a:off x="0" y="0"/>
+          <a:ext cx="0" cy="0"/>
+          <a:chOff x="0" y="0"/>
+          <a:chExt cx="0" cy="0"/>
+        </a:xfrm>
+      </p:grpSpPr>
+      <p:pic>
+        <p:nvPicPr>
+          <p:cNvPr id="54" name="Picture 53" descr="A map of the world&#10;&#10;Description automatically generated">
+            <a:extLst>
+              <a:ext uri="{FF2B5EF4-FFF2-40B4-BE49-F238E27FC236}">
+                <a16:creationId xmlns:a16="http://schemas.microsoft.com/office/drawing/2014/main" id="{FA796224-5618-1006-B2CF-012CA2543235}"/>
+              </a:ext>
+            </a:extLst>
+          </p:cNvPr>
+          <p:cNvPicPr>
+            <a:picLocks noChangeAspect="1"/>
+          </p:cNvPicPr>
+          <p:nvPr/>
+        </p:nvPicPr>
+        <p:blipFill>
+          <a:blip r:embed="rId2"/>
+          <a:stretch>
+            <a:fillRect/>
+          </a:stretch>
+        </p:blipFill>
+        <p:spPr>
+          <a:xfrm>
+            <a:off x="2137611" y="-6684"/>
+            <a:ext cx="7772400" cy="3454400"/>
+          </a:xfrm>
+          <a:prstGeom prst="rect">
+            <a:avLst/>
+          </a:prstGeom>
+        </p:spPr>
+      </p:pic>
+      <p:pic>
+        <p:nvPicPr>
+          <p:cNvPr id="58" name="Picture 57" descr="A diagram of a temperature&#10;&#10;Description automatically generated">
+            <a:extLst>
+              <a:ext uri="{FF2B5EF4-FFF2-40B4-BE49-F238E27FC236}">
+                <a16:creationId xmlns:a16="http://schemas.microsoft.com/office/drawing/2014/main" id="{BB43AAA9-80B1-4611-57D4-6FB3C0009F19}"/>
+              </a:ext>
+            </a:extLst>
+          </p:cNvPr>
+          <p:cNvPicPr>
+            <a:picLocks noChangeAspect="1"/>
+          </p:cNvPicPr>
+          <p:nvPr/>
+        </p:nvPicPr>
+        <p:blipFill>
+          <a:blip r:embed="rId3"/>
+          <a:stretch>
+            <a:fillRect/>
+          </a:stretch>
+        </p:blipFill>
+        <p:spPr>
+          <a:xfrm>
+            <a:off x="2398294" y="3403600"/>
+            <a:ext cx="7772400" cy="3454400"/>
+          </a:xfrm>
+          <a:prstGeom prst="rect">
+            <a:avLst/>
+          </a:prstGeom>
+        </p:spPr>
+      </p:pic>
+    </p:spTree>
+    <p:extLst>
+      <p:ext uri="{BB962C8B-B14F-4D97-AF65-F5344CB8AC3E}">
+        <p14:creationId xmlns:p14="http://schemas.microsoft.com/office/powerpoint/2010/main" val="1073626142"/>
+      </p:ext>
+    </p:extLst>
+  </p:cSld>
+  <p:clrMapOvr>
+    <a:masterClrMapping/>
+  </p:clrMapOvr>
+</p:sld>
+</file>
+
+<file path=ppt/slides/slide3.xml><?xml version="1.0" encoding="utf-8"?>
+<p:sld xmlns:a="http://schemas.openxmlformats.org/drawingml/2006/main" xmlns:r="http://schemas.openxmlformats.org/officeDocument/2006/relationships" xmlns:p="http://schemas.openxmlformats.org/presentationml/2006/main">
+  <p:cSld>
+    <p:spTree>
+      <p:nvGrpSpPr>
+        <p:cNvPr id="1" name=""/>
+        <p:cNvGrpSpPr/>
+        <p:nvPr/>
+      </p:nvGrpSpPr>
+      <p:grpSpPr>
+        <a:xfrm>
+          <a:off x="0" y="0"/>
+          <a:ext cx="0" cy="0"/>
+          <a:chOff x="0" y="0"/>
+          <a:chExt cx="0" cy="0"/>
+        </a:xfrm>
+      </p:grpSpPr>
+      <p:pic>
+        <p:nvPicPr>
+          <p:cNvPr id="2" name="Picture 1">
+            <a:extLst>
+              <a:ext uri="{FF2B5EF4-FFF2-40B4-BE49-F238E27FC236}">
+                <a16:creationId xmlns:a16="http://schemas.microsoft.com/office/drawing/2014/main" id="{75A72F0E-E201-A202-526B-215707B0E02C}"/>
+              </a:ext>
+            </a:extLst>
+          </p:cNvPr>
+          <p:cNvPicPr>
+            <a:picLocks noChangeAspect="1"/>
+          </p:cNvPicPr>
+          <p:nvPr/>
+        </p:nvPicPr>
+        <p:blipFill>
+          <a:blip r:embed="rId2"/>
+          <a:stretch>
+            <a:fillRect/>
+          </a:stretch>
+        </p:blipFill>
+        <p:spPr>
+          <a:xfrm>
+            <a:off x="2359764" y="814956"/>
+            <a:ext cx="6928161" cy="4744576"/>
+          </a:xfrm>
+          <a:prstGeom prst="rect">
+            <a:avLst/>
+          </a:prstGeom>
+        </p:spPr>
+      </p:pic>
+    </p:spTree>
+    <p:extLst>
+      <p:ext uri="{BB962C8B-B14F-4D97-AF65-F5344CB8AC3E}">
+        <p14:creationId xmlns:p14="http://schemas.microsoft.com/office/powerpoint/2010/main" val="1168958161"/>
+      </p:ext>
+    </p:extLst>
+  </p:cSld>
+  <p:clrMapOvr>
+    <a:masterClrMapping/>
+  </p:clrMapOvr>
+</p:sld>
+</file>
+
+<file path=ppt/slides/slide4.xml><?xml version="1.0" encoding="utf-8"?>
+<p:sld xmlns:a="http://schemas.openxmlformats.org/drawingml/2006/main" xmlns:r="http://schemas.openxmlformats.org/officeDocument/2006/relationships" xmlns:p="http://schemas.openxmlformats.org/presentationml/2006/main">
+  <p:cSld>
+    <p:spTree>
+      <p:nvGrpSpPr>
+        <p:cNvPr id="1" name=""/>
+        <p:cNvGrpSpPr/>
+        <p:nvPr/>
+      </p:nvGrpSpPr>
+      <p:grpSpPr>
+        <a:xfrm>
+          <a:off x="0" y="0"/>
+          <a:ext cx="0" cy="0"/>
+          <a:chOff x="0" y="0"/>
+          <a:chExt cx="0" cy="0"/>
+        </a:xfrm>
+      </p:grpSpPr>
+    </p:spTree>
+    <p:extLst>
+      <p:ext uri="{BB962C8B-B14F-4D97-AF65-F5344CB8AC3E}">
+        <p14:creationId xmlns:p14="http://schemas.microsoft.com/office/powerpoint/2010/main" val="4144254026"/>
+      </p:ext>
+    </p:extLst>
+  </p:cSld>
+  <p:clrMapOvr>
+    <a:masterClrMapping/>
+  </p:clrMapOvr>
+</p:sld>
+</file>
+
+<file path=ppt/slides/slide5.xml><?xml version="1.0" encoding="utf-8"?>
+<p:sld xmlns:a="http://schemas.openxmlformats.org/drawingml/2006/main" xmlns:r="http://schemas.openxmlformats.org/officeDocument/2006/relationships" xmlns:p="http://schemas.openxmlformats.org/presentationml/2006/main">
+  <p:cSld>
+    <p:spTree>
+      <p:nvGrpSpPr>
+        <p:cNvPr id="1" name=""/>
+        <p:cNvGrpSpPr/>
+        <p:nvPr/>
+      </p:nvGrpSpPr>
+      <p:grpSpPr>
+        <a:xfrm>
+          <a:off x="0" y="0"/>
+          <a:ext cx="0" cy="0"/>
+          <a:chOff x="0" y="0"/>
+          <a:chExt cx="0" cy="0"/>
+        </a:xfrm>
+      </p:grpSpPr>
+      <p:grpSp>
+        <p:nvGrpSpPr>
+          <p:cNvPr id="29" name="Group 28">
+            <a:extLst>
+              <a:ext uri="{FF2B5EF4-FFF2-40B4-BE49-F238E27FC236}">
+                <a16:creationId xmlns:a16="http://schemas.microsoft.com/office/drawing/2014/main" id="{D975F71D-0A9C-96CD-A209-810D1C5DF5E7}"/>
+              </a:ext>
+            </a:extLst>
+          </p:cNvPr>
+          <p:cNvGrpSpPr/>
+          <p:nvPr/>
+        </p:nvGrpSpPr>
+        <p:grpSpPr>
+          <a:xfrm>
+            <a:off x="829971" y="861951"/>
+            <a:ext cx="10193874" cy="4480366"/>
+            <a:chOff x="829971" y="861951"/>
+            <a:chExt cx="10193874" cy="4480366"/>
+          </a:xfrm>
+        </p:grpSpPr>
+        <p:pic>
+          <p:nvPicPr>
+            <p:cNvPr id="20" name="Picture 19">
+              <a:extLst>
+                <a:ext uri="{FF2B5EF4-FFF2-40B4-BE49-F238E27FC236}">
+                  <a16:creationId xmlns:a16="http://schemas.microsoft.com/office/drawing/2014/main" id="{6AF49A4B-DCD8-DD83-C3B5-29755228DD5C}"/>
+                </a:ext>
+              </a:extLst>
+            </p:cNvPr>
+            <p:cNvPicPr>
+              <a:picLocks noChangeAspect="1"/>
+            </p:cNvPicPr>
+            <p:nvPr/>
+          </p:nvPicPr>
+          <p:blipFill rotWithShape="1">
+            <a:blip r:embed="rId2"/>
+            <a:srcRect r="22625" b="5472"/>
+            <a:stretch/>
+          </p:blipFill>
+          <p:spPr>
+            <a:xfrm>
+              <a:off x="5543101" y="1200505"/>
+              <a:ext cx="4358217" cy="3789343"/>
+            </a:xfrm>
+            <a:prstGeom prst="rect">
+              <a:avLst/>
+            </a:prstGeom>
+          </p:spPr>
+        </p:pic>
+        <p:pic>
+          <p:nvPicPr>
+            <p:cNvPr id="19" name="Picture 18">
+              <a:extLst>
+                <a:ext uri="{FF2B5EF4-FFF2-40B4-BE49-F238E27FC236}">
+                  <a16:creationId xmlns:a16="http://schemas.microsoft.com/office/drawing/2014/main" id="{1FF35886-3B4A-5234-C94C-F7ECA200E319}"/>
+                </a:ext>
+              </a:extLst>
+            </p:cNvPr>
+            <p:cNvPicPr>
+              <a:picLocks/>
+            </p:cNvPicPr>
+            <p:nvPr/>
+          </p:nvPicPr>
+          <p:blipFill>
+            <a:blip r:embed="rId3"/>
+            <a:stretch>
+              <a:fillRect/>
+            </a:stretch>
+          </p:blipFill>
+          <p:spPr>
+            <a:xfrm>
+              <a:off x="999247" y="1200505"/>
+              <a:ext cx="4358216" cy="4020277"/>
+            </a:xfrm>
+            <a:prstGeom prst="rect">
+              <a:avLst/>
+            </a:prstGeom>
+          </p:spPr>
+        </p:pic>
+        <p:sp>
+          <p:nvSpPr>
+            <p:cNvPr id="13" name="TextBox 12">
+              <a:extLst>
+                <a:ext uri="{FF2B5EF4-FFF2-40B4-BE49-F238E27FC236}">
+                  <a16:creationId xmlns:a16="http://schemas.microsoft.com/office/drawing/2014/main" id="{FACE5FEE-6F99-9223-D3D7-EF7C0AF761E8}"/>
+                </a:ext>
+              </a:extLst>
+            </p:cNvPr>
+            <p:cNvSpPr txBox="1"/>
+            <p:nvPr/>
+          </p:nvSpPr>
+          <p:spPr>
+            <a:xfrm rot="16200000">
+              <a:off x="492709" y="2759484"/>
+              <a:ext cx="1013077" cy="338554"/>
+            </a:xfrm>
+            <a:prstGeom prst="rect">
+              <a:avLst/>
+            </a:prstGeom>
+            <a:solidFill>
+              <a:schemeClr val="bg1"/>
+            </a:solidFill>
+          </p:spPr>
+          <p:txBody>
+            <a:bodyPr wrap="square" rtlCol="0">
+              <a:spAutoFit/>
+            </a:bodyPr>
+            <a:lstStyle/>
+            <a:p>
+              <a:r>
+                <a:rPr lang="en-US" sz="1600" dirty="0">
+                  <a:latin typeface="Arial" panose="020B0604020202020204" pitchFamily="34" charset="0"/>
+                  <a:cs typeface="Arial" panose="020B0604020202020204" pitchFamily="34" charset="0"/>
+                </a:rPr>
+                <a:t>Trait</a:t>
+              </a:r>
+            </a:p>
+          </p:txBody>
+        </p:sp>
+        <p:sp>
+          <p:nvSpPr>
+            <p:cNvPr id="14" name="TextBox 13">
+              <a:extLst>
+                <a:ext uri="{FF2B5EF4-FFF2-40B4-BE49-F238E27FC236}">
+                  <a16:creationId xmlns:a16="http://schemas.microsoft.com/office/drawing/2014/main" id="{751C5D94-1494-EA1E-0DB3-5ACB0EE9B9AD}"/>
+                </a:ext>
+              </a:extLst>
+            </p:cNvPr>
+            <p:cNvSpPr txBox="1"/>
+            <p:nvPr/>
+          </p:nvSpPr>
+          <p:spPr>
+            <a:xfrm rot="16200000">
+              <a:off x="5036563" y="2656660"/>
+              <a:ext cx="1013077" cy="338554"/>
+            </a:xfrm>
+            <a:prstGeom prst="rect">
+              <a:avLst/>
+            </a:prstGeom>
+            <a:solidFill>
+              <a:schemeClr val="bg1"/>
+            </a:solidFill>
+          </p:spPr>
+          <p:txBody>
+            <a:bodyPr wrap="square" rtlCol="0">
+              <a:spAutoFit/>
+            </a:bodyPr>
+            <a:lstStyle/>
+            <a:p>
+              <a:r>
+                <a:rPr lang="en-US" sz="1600" dirty="0">
+                  <a:latin typeface="Arial" panose="020B0604020202020204" pitchFamily="34" charset="0"/>
+                  <a:cs typeface="Arial" panose="020B0604020202020204" pitchFamily="34" charset="0"/>
+                </a:rPr>
+                <a:t>Trait</a:t>
+              </a:r>
+            </a:p>
+          </p:txBody>
+        </p:sp>
+        <p:sp>
+          <p:nvSpPr>
+            <p:cNvPr id="15" name="TextBox 14">
+              <a:extLst>
+                <a:ext uri="{FF2B5EF4-FFF2-40B4-BE49-F238E27FC236}">
+                  <a16:creationId xmlns:a16="http://schemas.microsoft.com/office/drawing/2014/main" id="{B73B02C9-8751-FF51-5FF0-C674FE171853}"/>
+                </a:ext>
+              </a:extLst>
+            </p:cNvPr>
+            <p:cNvSpPr txBox="1"/>
+            <p:nvPr/>
+          </p:nvSpPr>
+          <p:spPr>
+            <a:xfrm>
+              <a:off x="2593418" y="5003763"/>
+              <a:ext cx="1355512" cy="338554"/>
+            </a:xfrm>
+            <a:prstGeom prst="rect">
+              <a:avLst/>
+            </a:prstGeom>
+            <a:solidFill>
+              <a:schemeClr val="bg1"/>
+            </a:solidFill>
+          </p:spPr>
+          <p:txBody>
+            <a:bodyPr wrap="square" rtlCol="0">
+              <a:spAutoFit/>
+            </a:bodyPr>
+            <a:lstStyle/>
+            <a:p>
+              <a:r>
+                <a:rPr lang="en-US" sz="1600" dirty="0">
+                  <a:latin typeface="Arial" panose="020B0604020202020204" pitchFamily="34" charset="0"/>
+                  <a:cs typeface="Arial" panose="020B0604020202020204" pitchFamily="34" charset="0"/>
+                </a:rPr>
+                <a:t>713 nm</a:t>
+              </a:r>
+            </a:p>
+          </p:txBody>
+        </p:sp>
+        <p:sp>
+          <p:nvSpPr>
+            <p:cNvPr id="16" name="TextBox 15">
+              <a:extLst>
+                <a:ext uri="{FF2B5EF4-FFF2-40B4-BE49-F238E27FC236}">
+                  <a16:creationId xmlns:a16="http://schemas.microsoft.com/office/drawing/2014/main" id="{9C41B5CE-1694-0036-E107-A23C35C9F662}"/>
+                </a:ext>
+              </a:extLst>
+            </p:cNvPr>
+            <p:cNvSpPr txBox="1"/>
+            <p:nvPr/>
+          </p:nvSpPr>
+          <p:spPr>
+            <a:xfrm>
+              <a:off x="7449821" y="4989848"/>
+              <a:ext cx="1355512" cy="338554"/>
+            </a:xfrm>
+            <a:prstGeom prst="rect">
+              <a:avLst/>
+            </a:prstGeom>
+            <a:solidFill>
+              <a:schemeClr val="bg1"/>
+            </a:solidFill>
+          </p:spPr>
+          <p:txBody>
+            <a:bodyPr wrap="square" rtlCol="0">
+              <a:spAutoFit/>
+            </a:bodyPr>
+            <a:lstStyle/>
+            <a:p>
+              <a:r>
+                <a:rPr lang="en-US" sz="1600" dirty="0">
+                  <a:latin typeface="Arial" panose="020B0604020202020204" pitchFamily="34" charset="0"/>
+                  <a:cs typeface="Arial" panose="020B0604020202020204" pitchFamily="34" charset="0"/>
+                </a:rPr>
+                <a:t>713 nm</a:t>
+              </a:r>
+            </a:p>
+          </p:txBody>
+        </p:sp>
+        <p:grpSp>
+          <p:nvGrpSpPr>
+            <p:cNvPr id="26" name="Group 25">
+              <a:extLst>
+                <a:ext uri="{FF2B5EF4-FFF2-40B4-BE49-F238E27FC236}">
+                  <a16:creationId xmlns:a16="http://schemas.microsoft.com/office/drawing/2014/main" id="{417E6669-DBEF-A4F3-2D0D-8457CF27D9C3}"/>
+                </a:ext>
+              </a:extLst>
+            </p:cNvPr>
+            <p:cNvGrpSpPr/>
+            <p:nvPr/>
+          </p:nvGrpSpPr>
+          <p:grpSpPr>
+            <a:xfrm>
+              <a:off x="9805251" y="2578840"/>
+              <a:ext cx="1218594" cy="826243"/>
+              <a:chOff x="6096000" y="4757542"/>
+              <a:chExt cx="1218594" cy="826243"/>
+            </a:xfrm>
+          </p:grpSpPr>
+          <p:pic>
+            <p:nvPicPr>
+              <p:cNvPr id="21" name="Picture 20">
+                <a:extLst>
+                  <a:ext uri="{FF2B5EF4-FFF2-40B4-BE49-F238E27FC236}">
+                    <a16:creationId xmlns:a16="http://schemas.microsoft.com/office/drawing/2014/main" id="{951594CD-8A63-EB00-F607-9E107C2EB2FA}"/>
+                  </a:ext>
+                </a:extLst>
+              </p:cNvPr>
+              <p:cNvPicPr>
+                <a:picLocks noChangeAspect="1"/>
+              </p:cNvPicPr>
+              <p:nvPr/>
+            </p:nvPicPr>
+            <p:blipFill rotWithShape="1">
+              <a:blip r:embed="rId2"/>
+              <a:srcRect l="76661" t="38462" r="17328" b="41045"/>
+              <a:stretch/>
+            </p:blipFill>
+            <p:spPr>
+              <a:xfrm>
+                <a:off x="6096000" y="4762295"/>
+                <a:ext cx="338555" cy="821490"/>
+              </a:xfrm>
+              <a:prstGeom prst="rect">
+                <a:avLst/>
+              </a:prstGeom>
+            </p:spPr>
+          </p:pic>
+          <p:sp>
+            <p:nvSpPr>
+              <p:cNvPr id="22" name="TextBox 21">
+                <a:extLst>
+                  <a:ext uri="{FF2B5EF4-FFF2-40B4-BE49-F238E27FC236}">
+                    <a16:creationId xmlns:a16="http://schemas.microsoft.com/office/drawing/2014/main" id="{9E500858-7AA5-401C-2AAD-6E6050C9C397}"/>
+                  </a:ext>
+                </a:extLst>
+              </p:cNvPr>
+              <p:cNvSpPr txBox="1"/>
+              <p:nvPr/>
+            </p:nvSpPr>
+            <p:spPr>
+              <a:xfrm>
+                <a:off x="6344457" y="4757542"/>
+                <a:ext cx="970137" cy="246221"/>
+              </a:xfrm>
+              <a:prstGeom prst="rect">
+                <a:avLst/>
+              </a:prstGeom>
+              <a:noFill/>
+            </p:spPr>
+            <p:txBody>
+              <a:bodyPr wrap="none" rtlCol="0">
+                <a:spAutoFit/>
+              </a:bodyPr>
+              <a:lstStyle/>
+              <a:p>
+                <a:r>
+                  <a:rPr lang="en-US" sz="1000" dirty="0">
+                    <a:latin typeface="Arial" panose="020B0604020202020204" pitchFamily="34" charset="0"/>
+                    <a:cs typeface="Arial" panose="020B0604020202020204" pitchFamily="34" charset="0"/>
+                  </a:rPr>
+                  <a:t>broadleaf tree</a:t>
+                </a:r>
+              </a:p>
+            </p:txBody>
+          </p:sp>
+          <p:sp>
+            <p:nvSpPr>
+              <p:cNvPr id="23" name="TextBox 22">
+                <a:extLst>
+                  <a:ext uri="{FF2B5EF4-FFF2-40B4-BE49-F238E27FC236}">
+                    <a16:creationId xmlns:a16="http://schemas.microsoft.com/office/drawing/2014/main" id="{44D065EA-1421-FC58-FD46-85557A99B760}"/>
+                  </a:ext>
+                </a:extLst>
+              </p:cNvPr>
+              <p:cNvSpPr txBox="1"/>
+              <p:nvPr/>
+            </p:nvSpPr>
+            <p:spPr>
+              <a:xfrm>
+                <a:off x="6344457" y="4924442"/>
+                <a:ext cx="497252" cy="246221"/>
+              </a:xfrm>
+              <a:prstGeom prst="rect">
+                <a:avLst/>
+              </a:prstGeom>
+              <a:noFill/>
+            </p:spPr>
+            <p:txBody>
+              <a:bodyPr wrap="none" rtlCol="0">
+                <a:spAutoFit/>
+              </a:bodyPr>
+              <a:lstStyle/>
+              <a:p>
+                <a:r>
+                  <a:rPr lang="en-US" sz="1000" dirty="0">
+                    <a:latin typeface="Arial" panose="020B0604020202020204" pitchFamily="34" charset="0"/>
+                    <a:cs typeface="Arial" panose="020B0604020202020204" pitchFamily="34" charset="0"/>
+                  </a:rPr>
+                  <a:t>grass</a:t>
+                </a:r>
+              </a:p>
+            </p:txBody>
+          </p:sp>
+          <p:sp>
+            <p:nvSpPr>
+              <p:cNvPr id="24" name="TextBox 23">
+                <a:extLst>
+                  <a:ext uri="{FF2B5EF4-FFF2-40B4-BE49-F238E27FC236}">
+                    <a16:creationId xmlns:a16="http://schemas.microsoft.com/office/drawing/2014/main" id="{513A0B83-9323-C0F2-306D-615903E6C337}"/>
+                  </a:ext>
+                </a:extLst>
+              </p:cNvPr>
+              <p:cNvSpPr txBox="1"/>
+              <p:nvPr/>
+            </p:nvSpPr>
+            <p:spPr>
+              <a:xfrm>
+                <a:off x="6361486" y="5131002"/>
+                <a:ext cx="439544" cy="246221"/>
+              </a:xfrm>
+              <a:prstGeom prst="rect">
+                <a:avLst/>
+              </a:prstGeom>
+              <a:noFill/>
+            </p:spPr>
+            <p:txBody>
+              <a:bodyPr wrap="none" rtlCol="0">
+                <a:spAutoFit/>
+              </a:bodyPr>
+              <a:lstStyle/>
+              <a:p>
+                <a:r>
+                  <a:rPr lang="en-US" sz="1000" dirty="0">
+                    <a:latin typeface="Arial" panose="020B0604020202020204" pitchFamily="34" charset="0"/>
+                    <a:cs typeface="Arial" panose="020B0604020202020204" pitchFamily="34" charset="0"/>
+                  </a:rPr>
+                  <a:t>herb</a:t>
+                </a:r>
+              </a:p>
+            </p:txBody>
+          </p:sp>
+          <p:sp>
+            <p:nvSpPr>
+              <p:cNvPr id="25" name="TextBox 24">
+                <a:extLst>
+                  <a:ext uri="{FF2B5EF4-FFF2-40B4-BE49-F238E27FC236}">
+                    <a16:creationId xmlns:a16="http://schemas.microsoft.com/office/drawing/2014/main" id="{40650E53-865D-F463-2ADC-280453693FBB}"/>
+                  </a:ext>
+                </a:extLst>
+              </p:cNvPr>
+              <p:cNvSpPr txBox="1"/>
+              <p:nvPr/>
+            </p:nvSpPr>
+            <p:spPr>
+              <a:xfrm>
+                <a:off x="6364193" y="5329533"/>
+                <a:ext cx="821059" cy="246221"/>
+              </a:xfrm>
+              <a:prstGeom prst="rect">
+                <a:avLst/>
+              </a:prstGeom>
+              <a:noFill/>
+            </p:spPr>
+            <p:txBody>
+              <a:bodyPr wrap="none" rtlCol="0">
+                <a:spAutoFit/>
+              </a:bodyPr>
+              <a:lstStyle/>
+              <a:p>
+                <a:r>
+                  <a:rPr lang="en-US" sz="1000" dirty="0">
+                    <a:latin typeface="Arial" panose="020B0604020202020204" pitchFamily="34" charset="0"/>
+                    <a:cs typeface="Arial" panose="020B0604020202020204" pitchFamily="34" charset="0"/>
+                  </a:rPr>
+                  <a:t>needle tree</a:t>
+                </a:r>
+              </a:p>
+            </p:txBody>
+          </p:sp>
+        </p:grpSp>
+        <p:sp>
+          <p:nvSpPr>
+            <p:cNvPr id="27" name="TextBox 26">
+              <a:extLst>
+                <a:ext uri="{FF2B5EF4-FFF2-40B4-BE49-F238E27FC236}">
+                  <a16:creationId xmlns:a16="http://schemas.microsoft.com/office/drawing/2014/main" id="{2C49328D-D947-8306-4E84-A71323D51A74}"/>
+                </a:ext>
+              </a:extLst>
+            </p:cNvPr>
+            <p:cNvSpPr txBox="1"/>
+            <p:nvPr/>
+          </p:nvSpPr>
+          <p:spPr>
+            <a:xfrm>
+              <a:off x="1168525" y="861951"/>
+              <a:ext cx="537313" cy="338554"/>
+            </a:xfrm>
+            <a:prstGeom prst="rect">
+              <a:avLst/>
+            </a:prstGeom>
+            <a:solidFill>
+              <a:schemeClr val="bg1"/>
+            </a:solidFill>
+          </p:spPr>
+          <p:txBody>
+            <a:bodyPr wrap="square" rtlCol="0">
+              <a:spAutoFit/>
+            </a:bodyPr>
+            <a:lstStyle/>
+            <a:p>
+              <a:r>
+                <a:rPr lang="en-US" sz="1600" dirty="0">
+                  <a:latin typeface="Arial" panose="020B0604020202020204" pitchFamily="34" charset="0"/>
+                  <a:cs typeface="Arial" panose="020B0604020202020204" pitchFamily="34" charset="0"/>
+                </a:rPr>
+                <a:t>(a)</a:t>
+              </a:r>
+            </a:p>
+          </p:txBody>
+        </p:sp>
+        <p:sp>
+          <p:nvSpPr>
+            <p:cNvPr id="28" name="TextBox 27">
+              <a:extLst>
+                <a:ext uri="{FF2B5EF4-FFF2-40B4-BE49-F238E27FC236}">
+                  <a16:creationId xmlns:a16="http://schemas.microsoft.com/office/drawing/2014/main" id="{3B159A54-2ED3-39F7-758D-2B940079A2F0}"/>
+                </a:ext>
+              </a:extLst>
+            </p:cNvPr>
+            <p:cNvSpPr txBox="1"/>
+            <p:nvPr/>
+          </p:nvSpPr>
+          <p:spPr>
+            <a:xfrm>
+              <a:off x="5827343" y="861951"/>
+              <a:ext cx="537313" cy="338554"/>
+            </a:xfrm>
+            <a:prstGeom prst="rect">
+              <a:avLst/>
+            </a:prstGeom>
+            <a:solidFill>
+              <a:schemeClr val="bg1"/>
+            </a:solidFill>
+          </p:spPr>
+          <p:txBody>
+            <a:bodyPr wrap="square" rtlCol="0">
+              <a:spAutoFit/>
+            </a:bodyPr>
+            <a:lstStyle/>
+            <a:p>
+              <a:r>
+                <a:rPr lang="en-US" sz="1600" dirty="0">
+                  <a:latin typeface="Arial" panose="020B0604020202020204" pitchFamily="34" charset="0"/>
+                  <a:cs typeface="Arial" panose="020B0604020202020204" pitchFamily="34" charset="0"/>
+                </a:rPr>
+                <a:t>(b)</a:t>
+              </a:r>
+            </a:p>
+          </p:txBody>
+        </p:sp>
+      </p:grpSp>
+    </p:spTree>
+    <p:extLst>
+      <p:ext uri="{BB962C8B-B14F-4D97-AF65-F5344CB8AC3E}">
+        <p14:creationId xmlns:p14="http://schemas.microsoft.com/office/powerpoint/2010/main" val="1339790454"/>
+      </p:ext>
+    </p:extLst>
+  </p:cSld>
+  <p:clrMapOvr>
+    <a:masterClrMapping/>
+  </p:clrMapOvr>
 </p:sld>
 </file>
 

--- a/paper_draft/figures/ppt_for_figures.pptx
+++ b/paper_draft/figures/ppt_for_figures.pptx
@@ -263,7 +263,7 @@
           <a:p>
             <a:fld id="{2BFBAF12-DD5D-7144-BAF5-63CC8110871E}" type="datetimeFigureOut">
               <a:rPr lang="en-US" smtClean="0"/>
-              <a:t>6/3/24</a:t>
+              <a:t>8/8/24</a:t>
             </a:fld>
             <a:endParaRPr lang="en-US"/>
           </a:p>
@@ -461,7 +461,7 @@
           <a:p>
             <a:fld id="{2BFBAF12-DD5D-7144-BAF5-63CC8110871E}" type="datetimeFigureOut">
               <a:rPr lang="en-US" smtClean="0"/>
-              <a:t>6/3/24</a:t>
+              <a:t>8/8/24</a:t>
             </a:fld>
             <a:endParaRPr lang="en-US"/>
           </a:p>
@@ -669,7 +669,7 @@
           <a:p>
             <a:fld id="{2BFBAF12-DD5D-7144-BAF5-63CC8110871E}" type="datetimeFigureOut">
               <a:rPr lang="en-US" smtClean="0"/>
-              <a:t>6/3/24</a:t>
+              <a:t>8/8/24</a:t>
             </a:fld>
             <a:endParaRPr lang="en-US"/>
           </a:p>
@@ -867,7 +867,7 @@
           <a:p>
             <a:fld id="{2BFBAF12-DD5D-7144-BAF5-63CC8110871E}" type="datetimeFigureOut">
               <a:rPr lang="en-US" smtClean="0"/>
-              <a:t>6/3/24</a:t>
+              <a:t>8/8/24</a:t>
             </a:fld>
             <a:endParaRPr lang="en-US"/>
           </a:p>
@@ -1142,7 +1142,7 @@
           <a:p>
             <a:fld id="{2BFBAF12-DD5D-7144-BAF5-63CC8110871E}" type="datetimeFigureOut">
               <a:rPr lang="en-US" smtClean="0"/>
-              <a:t>6/3/24</a:t>
+              <a:t>8/8/24</a:t>
             </a:fld>
             <a:endParaRPr lang="en-US"/>
           </a:p>
@@ -1407,7 +1407,7 @@
           <a:p>
             <a:fld id="{2BFBAF12-DD5D-7144-BAF5-63CC8110871E}" type="datetimeFigureOut">
               <a:rPr lang="en-US" smtClean="0"/>
-              <a:t>6/3/24</a:t>
+              <a:t>8/8/24</a:t>
             </a:fld>
             <a:endParaRPr lang="en-US"/>
           </a:p>
@@ -1819,7 +1819,7 @@
           <a:p>
             <a:fld id="{2BFBAF12-DD5D-7144-BAF5-63CC8110871E}" type="datetimeFigureOut">
               <a:rPr lang="en-US" smtClean="0"/>
-              <a:t>6/3/24</a:t>
+              <a:t>8/8/24</a:t>
             </a:fld>
             <a:endParaRPr lang="en-US"/>
           </a:p>
@@ -1960,7 +1960,7 @@
           <a:p>
             <a:fld id="{2BFBAF12-DD5D-7144-BAF5-63CC8110871E}" type="datetimeFigureOut">
               <a:rPr lang="en-US" smtClean="0"/>
-              <a:t>6/3/24</a:t>
+              <a:t>8/8/24</a:t>
             </a:fld>
             <a:endParaRPr lang="en-US"/>
           </a:p>
@@ -2073,7 +2073,7 @@
           <a:p>
             <a:fld id="{2BFBAF12-DD5D-7144-BAF5-63CC8110871E}" type="datetimeFigureOut">
               <a:rPr lang="en-US" smtClean="0"/>
-              <a:t>6/3/24</a:t>
+              <a:t>8/8/24</a:t>
             </a:fld>
             <a:endParaRPr lang="en-US"/>
           </a:p>
@@ -2384,7 +2384,7 @@
           <a:p>
             <a:fld id="{2BFBAF12-DD5D-7144-BAF5-63CC8110871E}" type="datetimeFigureOut">
               <a:rPr lang="en-US" smtClean="0"/>
-              <a:t>6/3/24</a:t>
+              <a:t>8/8/24</a:t>
             </a:fld>
             <a:endParaRPr lang="en-US"/>
           </a:p>
@@ -2672,7 +2672,7 @@
           <a:p>
             <a:fld id="{2BFBAF12-DD5D-7144-BAF5-63CC8110871E}" type="datetimeFigureOut">
               <a:rPr lang="en-US" smtClean="0"/>
-              <a:t>6/3/24</a:t>
+              <a:t>8/8/24</a:t>
             </a:fld>
             <a:endParaRPr lang="en-US"/>
           </a:p>
@@ -2913,7 +2913,7 @@
           <a:p>
             <a:fld id="{2BFBAF12-DD5D-7144-BAF5-63CC8110871E}" type="datetimeFigureOut">
               <a:rPr lang="en-US" smtClean="0"/>
-              <a:t>6/3/24</a:t>
+              <a:t>8/8/24</a:t>
             </a:fld>
             <a:endParaRPr lang="en-US"/>
           </a:p>
@@ -4927,7 +4927,7 @@
           </a:ln>
           <a:extLst>
             <a:ext uri="{C572A759-6A51-4108-AA02-DFA0A04FC94B}">
-              <ma14:wrappingTextBoxFlag xmlns="" xmlns:m="http://schemas.openxmlformats.org/officeDocument/2006/math" xmlns:a14="http://schemas.microsoft.com/office/drawing/2010/main" xmlns:ma14="http://schemas.microsoft.com/office/mac/drawingml/2011/main" val="1"/>
+              <ma14:wrappingTextBoxFlag xmlns:ma14="http://schemas.microsoft.com/office/mac/drawingml/2011/main" xmlns:a14="http://schemas.microsoft.com/office/drawing/2010/main" xmlns:m="http://schemas.openxmlformats.org/officeDocument/2006/math" xmlns="" val="1"/>
             </a:ext>
           </a:extLst>
         </p:spPr>
@@ -5052,9 +5052,9 @@
           <p:nvPr/>
         </p:nvCxnSpPr>
         <p:spPr>
-          <a:xfrm rot="11640000">
-            <a:off x="4582168" y="4346366"/>
-            <a:ext cx="228598" cy="914400"/>
+          <a:xfrm flipV="1">
+            <a:off x="4696170" y="4332295"/>
+            <a:ext cx="0" cy="824729"/>
           </a:xfrm>
           <a:prstGeom prst="straightConnector1">
             <a:avLst/>
@@ -5142,9 +5142,9 @@
           <p:nvPr/>
         </p:nvCxnSpPr>
         <p:spPr>
-          <a:xfrm rot="840000">
-            <a:off x="6893681" y="4346366"/>
-            <a:ext cx="228598" cy="914400"/>
+          <a:xfrm>
+            <a:off x="7007683" y="4332295"/>
+            <a:ext cx="0" cy="751223"/>
           </a:xfrm>
           <a:prstGeom prst="straightConnector1">
             <a:avLst/>
